--- a/健管45成果-許雅雯.pptx
+++ b/健管45成果-許雅雯.pptx
@@ -4612,6 +4612,15 @@
             </a:endParaRPr>
           </a:p>
           <a:p>
+            <a:endParaRPr kumimoji="1" lang="en-US" altLang="zh-TW" sz="2400" b="1" dirty="0">
+              <a:solidFill>
+                <a:schemeClr val="tx1"/>
+              </a:solidFill>
+              <a:latin typeface="Microsoft JhengHei" panose="020B0604030504040204" pitchFamily="34" charset="-120"/>
+              <a:ea typeface="Microsoft JhengHei" panose="020B0604030504040204" pitchFamily="34" charset="-120"/>
+            </a:endParaRPr>
+          </a:p>
+          <a:p>
             <a:r>
               <a:rPr kumimoji="1" lang="zh-TW" altLang="en-US" sz="2400" b="1" dirty="0">
                 <a:solidFill>
@@ -4640,7 +4649,7 @@
                 <a:latin typeface="Microsoft JhengHei" panose="020B0604030504040204" pitchFamily="34" charset="-120"/>
                 <a:ea typeface="Microsoft JhengHei" panose="020B0604030504040204" pitchFamily="34" charset="-120"/>
               </a:rPr>
-              <a:t>、</a:t>
+              <a:t>、胃部漲氣</a:t>
             </a:r>
             <a:endParaRPr kumimoji="1" lang="en-US" altLang="zh-TW" sz="2400" b="1" dirty="0">
               <a:solidFill>
@@ -4679,7 +4688,7 @@
                 <a:latin typeface="Microsoft JhengHei" panose="020B0604030504040204" pitchFamily="34" charset="-120"/>
                 <a:ea typeface="Microsoft JhengHei" panose="020B0604030504040204" pitchFamily="34" charset="-120"/>
               </a:rPr>
-              <a:t>、</a:t>
+              <a:t>、皮膚過敏與溼疹</a:t>
             </a:r>
             <a:endParaRPr kumimoji="1" lang="en-US" altLang="zh-TW" sz="2400" b="1" dirty="0">
               <a:solidFill>
@@ -4718,7 +4727,17 @@
                 <a:latin typeface="Microsoft JhengHei" panose="020B0604030504040204" pitchFamily="34" charset="-120"/>
                 <a:ea typeface="Microsoft JhengHei" panose="020B0604030504040204" pitchFamily="34" charset="-120"/>
               </a:rPr>
-              <a:t>、</a:t>
+              <a:t>、精神變好，下午不會</a:t>
+            </a:r>
+            <a:r>
+              <a:rPr kumimoji="1" lang="zh-TW" altLang="en-US" sz="2400" b="1">
+                <a:solidFill>
+                  <a:schemeClr val="tx1"/>
+                </a:solidFill>
+                <a:latin typeface="Microsoft JhengHei" panose="020B0604030504040204" pitchFamily="34" charset="-120"/>
+                <a:ea typeface="Microsoft JhengHei" panose="020B0604030504040204" pitchFamily="34" charset="-120"/>
+              </a:rPr>
+              <a:t>打         打瞌睡</a:t>
             </a:r>
             <a:endParaRPr kumimoji="1" lang="en-US" altLang="zh-TW" sz="2400" b="1" dirty="0">
               <a:solidFill>
